--- a/services/web-app/resources/thesis-essay-decks/lesson-6-conclusion.pptx
+++ b/services/web-app/resources/thesis-essay-decks/lesson-6-conclusion.pptx
@@ -3601,7 +3601,7 @@
       </p:sp>
       <p:pic>
         <p:nvPicPr>
-          <p:cNvPr id="7" name="Image 0" descr="/home/user/yawp/services/web-app/scripts/thesis-essay-decks/assets/icons/lightbulb.png">    </p:cNvPr>
+          <p:cNvPr id="7" name="Image 0" descr="lightbulb icon">    </p:cNvPr>
           <p:cNvPicPr>
             <a:picLocks noChangeAspect="1"/>
           </p:cNvPicPr>
@@ -3650,7 +3650,7 @@
       </p:sp>
       <p:pic>
         <p:nvPicPr>
-          <p:cNvPr id="9" name="Image 1" descr="/home/user/yawp/services/web-app/scripts/thesis-essay-decks/assets/icons/puzzle.png">    </p:cNvPr>
+          <p:cNvPr id="9" name="Image 1" descr="puzzle icon">    </p:cNvPr>
           <p:cNvPicPr>
             <a:picLocks noChangeAspect="1"/>
           </p:cNvPicPr>
@@ -3699,7 +3699,7 @@
       </p:sp>
       <p:pic>
         <p:nvPicPr>
-          <p:cNvPr id="11" name="Image 2" descr="/home/user/yawp/services/web-app/scripts/thesis-essay-decks/assets/icons/thumbs.png">    </p:cNvPr>
+          <p:cNvPr id="11" name="Image 2" descr="thumbs icon">    </p:cNvPr>
           <p:cNvPicPr>
             <a:picLocks noChangeAspect="1"/>
           </p:cNvPicPr>
@@ -4269,7 +4269,7 @@
       </p:sp>
       <p:pic>
         <p:nvPicPr>
-          <p:cNvPr id="5" name="Image 0" descr="/home/user/yawp/services/web-app/scripts/thesis-essay-decks/assets/icons/question.png">    </p:cNvPr>
+          <p:cNvPr id="5" name="Image 0" descr="question icon">    </p:cNvPr>
           <p:cNvPicPr>
             <a:picLocks noChangeAspect="1"/>
           </p:cNvPicPr>
@@ -4990,7 +4990,7 @@
       </p:sp>
       <p:pic>
         <p:nvPicPr>
-          <p:cNvPr id="5" name="Image 0" descr="/home/user/yawp/services/web-app/scripts/thesis-essay-decks/assets/icons/question.png">    </p:cNvPr>
+          <p:cNvPr id="5" name="Image 0" descr="question icon">    </p:cNvPr>
           <p:cNvPicPr>
             <a:picLocks noChangeAspect="1"/>
           </p:cNvPicPr>
@@ -5714,7 +5714,7 @@
       </p:sp>
       <p:pic>
         <p:nvPicPr>
-          <p:cNvPr id="5" name="Image 0" descr="/home/user/yawp/services/web-app/scripts/thesis-essay-decks/assets/icons/question.png">    </p:cNvPr>
+          <p:cNvPr id="5" name="Image 0" descr="question icon">    </p:cNvPr>
           <p:cNvPicPr>
             <a:picLocks noChangeAspect="1"/>
           </p:cNvPicPr>
@@ -6229,7 +6229,7 @@
       </p:sp>
       <p:pic>
         <p:nvPicPr>
-          <p:cNvPr id="5" name="Image 0" descr="/home/user/yawp/services/web-app/scripts/thesis-essay-decks/assets/icons/question.png">    </p:cNvPr>
+          <p:cNvPr id="5" name="Image 0" descr="question icon">    </p:cNvPr>
           <p:cNvPicPr>
             <a:picLocks noChangeAspect="1"/>
           </p:cNvPicPr>
@@ -6828,7 +6828,7 @@
       </p:sp>
       <p:pic>
         <p:nvPicPr>
-          <p:cNvPr id="7" name="Image 0" descr="/home/user/yawp/services/web-app/scripts/thesis-essay-decks/assets/icons/lightbulb.png">    </p:cNvPr>
+          <p:cNvPr id="7" name="Image 0" descr="lightbulb icon">    </p:cNvPr>
           <p:cNvPicPr>
             <a:picLocks noChangeAspect="1"/>
           </p:cNvPicPr>
@@ -6877,7 +6877,7 @@
       </p:sp>
       <p:pic>
         <p:nvPicPr>
-          <p:cNvPr id="9" name="Image 1" descr="/home/user/yawp/services/web-app/scripts/thesis-essay-decks/assets/icons/puzzle.png">    </p:cNvPr>
+          <p:cNvPr id="9" name="Image 1" descr="puzzle icon">    </p:cNvPr>
           <p:cNvPicPr>
             <a:picLocks noChangeAspect="1"/>
           </p:cNvPicPr>
@@ -6926,7 +6926,7 @@
       </p:sp>
       <p:pic>
         <p:nvPicPr>
-          <p:cNvPr id="11" name="Image 2" descr="/home/user/yawp/services/web-app/scripts/thesis-essay-decks/assets/icons/thumbs.png">    </p:cNvPr>
+          <p:cNvPr id="11" name="Image 2" descr="thumbs icon">    </p:cNvPr>
           <p:cNvPicPr>
             <a:picLocks noChangeAspect="1"/>
           </p:cNvPicPr>
@@ -7301,7 +7301,7 @@
       </p:sp>
       <p:pic>
         <p:nvPicPr>
-          <p:cNvPr id="5" name="Image 0" descr="/home/user/yawp/services/web-app/scripts/thesis-essay-decks/assets/icons/question.png">    </p:cNvPr>
+          <p:cNvPr id="5" name="Image 0" descr="question icon">    </p:cNvPr>
           <p:cNvPicPr>
             <a:picLocks noChangeAspect="1"/>
           </p:cNvPicPr>
@@ -7411,12 +7411,6 @@
               </a:rPr>
               <a:t>A good conclusion </a:t>
             </a:r>
-            <a:pPr indent="0" marL="0">
-              <a:lnSpc>
-                <a:spcPct val="115000"/>
-              </a:lnSpc>
-              <a:buNone/>
-            </a:pPr>
             <a:r>
               <a:rPr lang="en-US" sz="4000" dirty="0">
                 <a:solidFill>
@@ -7431,12 +7425,6 @@
               </a:rPr>
               <a:t>restates the thesis and main ideas</a:t>
             </a:r>
-            <a:pPr indent="0" marL="0">
-              <a:lnSpc>
-                <a:spcPct val="115000"/>
-              </a:lnSpc>
-              <a:buNone/>
-            </a:pPr>
             <a:r>
               <a:rPr lang="en-US" sz="4000" dirty="0">
                 <a:solidFill>
@@ -7630,7 +7618,7 @@
       </p:sp>
       <p:pic>
         <p:nvPicPr>
-          <p:cNvPr id="5" name="Image 0" descr="/home/user/yawp/services/web-app/scripts/thesis-essay-decks/assets/icons/eye.png">    </p:cNvPr>
+          <p:cNvPr id="5" name="Image 0" descr="eye icon">    </p:cNvPr>
           <p:cNvPicPr>
             <a:picLocks noChangeAspect="1"/>
           </p:cNvPicPr>
@@ -7740,12 +7728,6 @@
               </a:rPr>
               <a:t>Restating your thesis and main ideas can make you seem like </a:t>
             </a:r>
-            <a:pPr indent="0" marL="0">
-              <a:lnSpc>
-                <a:spcPct val="115000"/>
-              </a:lnSpc>
-              <a:buNone/>
-            </a:pPr>
             <a:r>
               <a:rPr lang="en-US" sz="4000" dirty="0">
                 <a:solidFill>
@@ -8251,12 +8233,6 @@
               </a:rPr>
               <a:t>A </a:t>
             </a:r>
-            <a:pPr indent="0" marL="0">
-              <a:lnSpc>
-                <a:spcPct val="115000"/>
-              </a:lnSpc>
-              <a:buNone/>
-            </a:pPr>
             <a:r>
               <a:rPr lang="en-US" sz="2600" dirty="0">
                 <a:solidFill>
@@ -8271,12 +8247,6 @@
               </a:rPr>
               <a:t>deduction</a:t>
             </a:r>
-            <a:pPr indent="0" marL="0">
-              <a:lnSpc>
-                <a:spcPct val="115000"/>
-              </a:lnSpc>
-              <a:buNone/>
-            </a:pPr>
             <a:r>
               <a:rPr lang="en-US" sz="2600" dirty="0">
                 <a:solidFill>
@@ -8470,7 +8440,7 @@
       </p:sp>
       <p:pic>
         <p:nvPicPr>
-          <p:cNvPr id="5" name="Image 0" descr="/home/user/yawp/services/web-app/scripts/thesis-essay-decks/assets/icons/lightbulb.png">    </p:cNvPr>
+          <p:cNvPr id="5" name="Image 0" descr="lightbulb icon">    </p:cNvPr>
           <p:cNvPicPr>
             <a:picLocks noChangeAspect="1"/>
           </p:cNvPicPr>
@@ -8580,12 +8550,6 @@
               </a:rPr>
               <a:t>By the end of your essay, you should have exhaustively defined, illustrated, and proven the elements of your thesis. And your reader should be right there with you. So if everything you just said is true, then </a:t>
             </a:r>
-            <a:pPr indent="0" marL="0">
-              <a:lnSpc>
-                <a:spcPct val="115000"/>
-              </a:lnSpc>
-              <a:buNone/>
-            </a:pPr>
             <a:r>
               <a:rPr lang="en-US" sz="2600" dirty="0">
                 <a:solidFill>
@@ -8782,7 +8746,7 @@
       </p:sp>
       <p:pic>
         <p:nvPicPr>
-          <p:cNvPr id="5" name="Image 0" descr="/home/user/yawp/services/web-app/scripts/thesis-essay-decks/assets/icons/puzzle.png">    </p:cNvPr>
+          <p:cNvPr id="5" name="Image 0" descr="puzzle icon">    </p:cNvPr>
           <p:cNvPicPr>
             <a:picLocks noChangeAspect="1"/>
           </p:cNvPicPr>
@@ -8892,12 +8856,6 @@
               </a:rPr>
               <a:t>If your essay discusses a problem, this could be a great place to discuss </a:t>
             </a:r>
-            <a:pPr indent="0" marL="0">
-              <a:lnSpc>
-                <a:spcPct val="115000"/>
-              </a:lnSpc>
-              <a:buNone/>
-            </a:pPr>
             <a:r>
               <a:rPr lang="en-US" sz="3200" dirty="0">
                 <a:solidFill>
@@ -8912,12 +8870,6 @@
               </a:rPr>
               <a:t>solutions</a:t>
             </a:r>
-            <a:pPr indent="0" marL="0">
-              <a:lnSpc>
-                <a:spcPct val="115000"/>
-              </a:lnSpc>
-              <a:buNone/>
-            </a:pPr>
             <a:r>
               <a:rPr lang="en-US" sz="3200" dirty="0">
                 <a:solidFill>
@@ -9111,7 +9063,7 @@
       </p:sp>
       <p:pic>
         <p:nvPicPr>
-          <p:cNvPr id="5" name="Image 0" descr="/home/user/yawp/services/web-app/scripts/thesis-essay-decks/assets/icons/question.png">    </p:cNvPr>
+          <p:cNvPr id="5" name="Image 0" descr="question icon">    </p:cNvPr>
           <p:cNvPicPr>
             <a:picLocks noChangeAspect="1"/>
           </p:cNvPicPr>
@@ -9935,7 +9887,7 @@
       </p:sp>
       <p:pic>
         <p:nvPicPr>
-          <p:cNvPr id="5" name="Image 0" descr="/home/user/yawp/services/web-app/scripts/thesis-essay-decks/assets/icons/question.png">    </p:cNvPr>
+          <p:cNvPr id="5" name="Image 0" descr="question icon">    </p:cNvPr>
           <p:cNvPicPr>
             <a:picLocks noChangeAspect="1"/>
           </p:cNvPicPr>
@@ -10045,12 +9997,6 @@
               </a:rPr>
               <a:t>Rhetorical questions can create a nice </a:t>
             </a:r>
-            <a:pPr indent="0" marL="0">
-              <a:lnSpc>
-                <a:spcPct val="115000"/>
-              </a:lnSpc>
-              <a:buNone/>
-            </a:pPr>
             <a:r>
               <a:rPr lang="en-US" sz="3200" dirty="0">
                 <a:solidFill>
@@ -10065,12 +10011,6 @@
               </a:rPr>
               <a:t>shift</a:t>
             </a:r>
-            <a:pPr indent="0" marL="0">
-              <a:lnSpc>
-                <a:spcPct val="115000"/>
-              </a:lnSpc>
-              <a:buNone/>
-            </a:pPr>
             <a:r>
               <a:rPr lang="en-US" sz="3200" dirty="0">
                 <a:solidFill>
@@ -10594,7 +10534,7 @@
       </p:sp>
       <p:pic>
         <p:nvPicPr>
-          <p:cNvPr id="5" name="Image 0" descr="/home/user/yawp/services/web-app/scripts/thesis-essay-decks/assets/icons/lightbulb.png">    </p:cNvPr>
+          <p:cNvPr id="5" name="Image 0" descr="lightbulb icon">    </p:cNvPr>
           <p:cNvPicPr>
             <a:picLocks noChangeAspect="1"/>
           </p:cNvPicPr>
@@ -10704,12 +10644,6 @@
               </a:rPr>
               <a:t>It’s assertive and smart without being aggressive, and it fits a conclusion’s tone: </a:t>
             </a:r>
-            <a:pPr indent="0" marL="0">
-              <a:lnSpc>
-                <a:spcPct val="115000"/>
-              </a:lnSpc>
-              <a:buNone/>
-            </a:pPr>
             <a:r>
               <a:rPr lang="en-US" sz="2600" dirty="0">
                 <a:solidFill>
@@ -10724,12 +10658,6 @@
               </a:rPr>
               <a:t>comfortable and confident.</a:t>
             </a:r>
-            <a:pPr indent="0" marL="0">
-              <a:lnSpc>
-                <a:spcPct val="115000"/>
-              </a:lnSpc>
-              <a:buNone/>
-            </a:pPr>
             <a:r>
               <a:rPr lang="en-US" sz="2600" dirty="0">
                 <a:solidFill>
@@ -11032,12 +10960,6 @@
               </a:rPr>
               <a:t>If we assume that teachers don’t like to be boring, then why doesn’t the education system teach them how to prioritize creative thinking in classrooms?</a:t>
             </a:r>
-            <a:pPr indent="0" marL="0">
-              <a:lnSpc>
-                <a:spcPct val="120000"/>
-              </a:lnSpc>
-              <a:buNone/>
-            </a:pPr>
             <a:r>
               <a:rPr lang="en-US" sz="2400" dirty="0">
                 <a:solidFill>
@@ -11050,12 +10972,6 @@
               <a:t>
 </a:t>
             </a:r>
-            <a:pPr indent="0" marL="0">
-              <a:lnSpc>
-                <a:spcPct val="120000"/>
-              </a:lnSpc>
-              <a:buNone/>
-            </a:pPr>
             <a:r>
               <a:rPr lang="en-US" sz="2400" dirty="0">
                 <a:solidFill>
@@ -11070,12 +10986,6 @@
               </a:rPr>
               <a:t>Perhaps the way teachers are taught today is wrong.</a:t>
             </a:r>
-            <a:pPr indent="0" marL="0">
-              <a:lnSpc>
-                <a:spcPct val="120000"/>
-              </a:lnSpc>
-              <a:buNone/>
-            </a:pPr>
             <a:r>
               <a:rPr lang="en-US" sz="2400" dirty="0">
                 <a:solidFill>
@@ -11269,7 +11179,7 @@
       </p:sp>
       <p:pic>
         <p:nvPicPr>
-          <p:cNvPr id="5" name="Image 0" descr="/home/user/yawp/services/web-app/scripts/thesis-essay-decks/assets/icons/puzzle.png">    </p:cNvPr>
+          <p:cNvPr id="5" name="Image 0" descr="puzzle icon">    </p:cNvPr>
           <p:cNvPicPr>
             <a:picLocks noChangeAspect="1"/>
           </p:cNvPicPr>
@@ -11611,9 +11521,6 @@
               </a:rPr>
               <a:t>Answer it directly (</a:t>
             </a:r>
-            <a:pPr indent="0" marL="0">
-              <a:buNone/>
-            </a:pPr>
             <a:r>
               <a:rPr lang="en-US" sz="2200" dirty="0">
                 <a:solidFill>
@@ -11628,9 +11535,6 @@
               </a:rPr>
               <a:t>“Perhaps…”</a:t>
             </a:r>
-            <a:pPr indent="0" marL="0">
-              <a:buNone/>
-            </a:pPr>
             <a:r>
               <a:rPr lang="en-US" sz="2200" dirty="0">
                 <a:solidFill>
@@ -12344,12 +12248,6 @@
               </a:rPr>
               <a:t>If we assume that teachers don’t like to be boring, then why doesn’t the education system teach them how to prioritize creative thinking in classrooms?</a:t>
             </a:r>
-            <a:pPr indent="0" marL="0">
-              <a:lnSpc>
-                <a:spcPct val="120000"/>
-              </a:lnSpc>
-              <a:buNone/>
-            </a:pPr>
             <a:r>
               <a:rPr lang="en-US" sz="2000" dirty="0">
                 <a:solidFill>
@@ -12361,12 +12259,6 @@
               </a:rPr>
               <a:t> </a:t>
             </a:r>
-            <a:pPr indent="0" marL="0">
-              <a:lnSpc>
-                <a:spcPct val="120000"/>
-              </a:lnSpc>
-              <a:buNone/>
-            </a:pPr>
             <a:r>
               <a:rPr lang="en-US" sz="2000" dirty="0">
                 <a:solidFill>
@@ -12381,12 +12273,6 @@
               </a:rPr>
               <a:t>Perhaps the way teachers are taught today is wrong.</a:t>
             </a:r>
-            <a:pPr indent="0" marL="0">
-              <a:lnSpc>
-                <a:spcPct val="120000"/>
-              </a:lnSpc>
-              <a:buNone/>
-            </a:pPr>
             <a:r>
               <a:rPr lang="en-US" sz="2000" dirty="0">
                 <a:solidFill>
@@ -12398,12 +12284,6 @@
               </a:rPr>
               <a:t> They put too much pressure on teachers to increase scores, and this trickles down to the students, and suddenly everything we do in school is about “the test.” No one can learn under those conditions. However, if administrators and teachers prioritized creative lessons, we could build engagement and excitement between the teachers and students. </a:t>
             </a:r>
-            <a:pPr indent="0" marL="0">
-              <a:lnSpc>
-                <a:spcPct val="120000"/>
-              </a:lnSpc>
-              <a:buNone/>
-            </a:pPr>
             <a:r>
               <a:rPr lang="en-US" sz="2000" b="1" dirty="0">
                 <a:solidFill>
@@ -13214,7 +13094,7 @@
       </p:sp>
       <p:pic>
         <p:nvPicPr>
-          <p:cNvPr id="5" name="Image 0" descr="/home/user/yawp/services/web-app/scripts/thesis-essay-decks/assets/yawp-editor-conclusion.png">    </p:cNvPr>
+          <p:cNvPr id="5" name="Image 0" descr="The YAWP! editor on the Conclusion step.">    </p:cNvPr>
           <p:cNvPicPr>
             <a:picLocks noChangeAspect="1"/>
           </p:cNvPicPr>
@@ -13296,9 +13176,6 @@
               </a:rPr>
               <a:t>The Tutor says </a:t>
             </a:r>
-            <a:pPr indent="0" marL="0">
-              <a:buNone/>
-            </a:pPr>
             <a:r>
               <a:rPr lang="en-US" sz="2000" dirty="0">
                 <a:solidFill>
@@ -13726,7 +13603,7 @@
       </p:sp>
       <p:pic>
         <p:nvPicPr>
-          <p:cNvPr id="6" name="Image 0" descr="/home/user/yawp/services/web-app/scripts/thesis-essay-decks/assets/icons/lightbulb.png">    </p:cNvPr>
+          <p:cNvPr id="6" name="Image 0" descr="lightbulb icon">    </p:cNvPr>
           <p:cNvPicPr>
             <a:picLocks noChangeAspect="1"/>
           </p:cNvPicPr>
@@ -13775,7 +13652,7 @@
       </p:sp>
       <p:pic>
         <p:nvPicPr>
-          <p:cNvPr id="8" name="Image 1" descr="/home/user/yawp/services/web-app/scripts/thesis-essay-decks/assets/icons/puzzle.png">    </p:cNvPr>
+          <p:cNvPr id="8" name="Image 1" descr="puzzle icon">    </p:cNvPr>
           <p:cNvPicPr>
             <a:picLocks noChangeAspect="1"/>
           </p:cNvPicPr>
@@ -13824,7 +13701,7 @@
       </p:sp>
       <p:pic>
         <p:nvPicPr>
-          <p:cNvPr id="10" name="Image 2" descr="/home/user/yawp/services/web-app/scripts/thesis-essay-decks/assets/icons/thumbs.png">    </p:cNvPr>
+          <p:cNvPr id="10" name="Image 2" descr="thumbs icon">    </p:cNvPr>
           <p:cNvPicPr>
             <a:picLocks noChangeAspect="1"/>
           </p:cNvPicPr>
@@ -14188,7 +14065,7 @@
       </p:sp>
       <p:pic>
         <p:nvPicPr>
-          <p:cNvPr id="5" name="Image 0" descr="/home/user/yawp/services/web-app/scripts/thesis-essay-decks/assets/icons/question.png">    </p:cNvPr>
+          <p:cNvPr id="5" name="Image 0" descr="question icon">    </p:cNvPr>
           <p:cNvPicPr>
             <a:picLocks noChangeAspect="1"/>
           </p:cNvPicPr>
@@ -15015,7 +14892,7 @@
       </p:sp>
       <p:pic>
         <p:nvPicPr>
-          <p:cNvPr id="5" name="Image 0" descr="/home/user/yawp/services/web-app/scripts/thesis-essay-decks/assets/icons/question.png">    </p:cNvPr>
+          <p:cNvPr id="5" name="Image 0" descr="question icon">    </p:cNvPr>
           <p:cNvPicPr>
             <a:picLocks noChangeAspect="1"/>
           </p:cNvPicPr>
@@ -15839,7 +15716,7 @@
       </p:sp>
       <p:pic>
         <p:nvPicPr>
-          <p:cNvPr id="5" name="Image 0" descr="/home/user/yawp/services/web-app/scripts/thesis-essay-decks/assets/icons/question.png">    </p:cNvPr>
+          <p:cNvPr id="5" name="Image 0" descr="question icon">    </p:cNvPr>
           <p:cNvPicPr>
             <a:picLocks noChangeAspect="1"/>
           </p:cNvPicPr>
@@ -16666,7 +16543,7 @@
       </p:sp>
       <p:pic>
         <p:nvPicPr>
-          <p:cNvPr id="5" name="Image 0" descr="/home/user/yawp/services/web-app/scripts/thesis-essay-decks/assets/icons/question.png">    </p:cNvPr>
+          <p:cNvPr id="5" name="Image 0" descr="question icon">    </p:cNvPr>
           <p:cNvPicPr>
             <a:picLocks noChangeAspect="1"/>
           </p:cNvPicPr>
@@ -17490,7 +17367,7 @@
       </p:sp>
       <p:pic>
         <p:nvPicPr>
-          <p:cNvPr id="5" name="Image 0" descr="/home/user/yawp/services/web-app/scripts/thesis-essay-decks/assets/icons/question.png">    </p:cNvPr>
+          <p:cNvPr id="5" name="Image 0" descr="question icon">    </p:cNvPr>
           <p:cNvPicPr>
             <a:picLocks noChangeAspect="1"/>
           </p:cNvPicPr>
@@ -18317,7 +18194,7 @@
       </p:sp>
       <p:pic>
         <p:nvPicPr>
-          <p:cNvPr id="5" name="Image 0" descr="/home/user/yawp/services/web-app/scripts/thesis-essay-decks/assets/icons/question.png">    </p:cNvPr>
+          <p:cNvPr id="5" name="Image 0" descr="question icon">    </p:cNvPr>
           <p:cNvPicPr>
             <a:picLocks noChangeAspect="1"/>
           </p:cNvPicPr>
@@ -19141,7 +19018,7 @@
       </p:sp>
       <p:pic>
         <p:nvPicPr>
-          <p:cNvPr id="5" name="Image 0" descr="/home/user/yawp/services/web-app/scripts/thesis-essay-decks/assets/icons/question.png">    </p:cNvPr>
+          <p:cNvPr id="5" name="Image 0" descr="question icon">    </p:cNvPr>
           <p:cNvPicPr>
             <a:picLocks noChangeAspect="1"/>
           </p:cNvPicPr>

--- a/services/web-app/resources/thesis-essay-decks/lesson-6-conclusion.pptx
+++ b/services/web-app/resources/thesis-essay-decks/lesson-6-conclusion.pptx
@@ -3960,7 +3960,7 @@
               <a:buNone/>
             </a:pPr>
             <a:r>
-              <a:rPr lang="en-US" sz="1300" b="1" spc="200" kern="0" dirty="0">
+              <a:rPr lang="en-US" sz="1300" b="1" dirty="0">
                 <a:solidFill>
                   <a:srgbClr val="02BDC7"/>
                 </a:solidFill>
@@ -3968,7 +3968,7 @@
                 <a:ea typeface="Consolas" pitchFamily="34" charset="-122"/>
                 <a:cs typeface="Consolas" pitchFamily="34" charset="-120"/>
               </a:rPr>
-              <a:t>THESIS-DRIVEN ESSAY · LESSON 6</a:t>
+              <a:t>Thesis-Driven Essay · Lesson 6</a:t>
             </a:r>
             <a:endParaRPr lang="en-US" sz="1300" dirty="0"/>
           </a:p>
@@ -4278,7 +4278,7 @@
               <a:buNone/>
             </a:pPr>
             <a:r>
-              <a:rPr lang="en-US" sz="1200" b="1" spc="200" kern="0" dirty="0">
+              <a:rPr lang="en-US" sz="1200" b="1" dirty="0">
                 <a:solidFill>
                   <a:srgbClr val="FC4067"/>
                 </a:solidFill>
@@ -4286,7 +4286,7 @@
                 <a:ea typeface="Consolas" pitchFamily="34" charset="-122"/>
                 <a:cs typeface="Consolas" pitchFamily="34" charset="-120"/>
               </a:rPr>
-              <a:t>REVIEW · 4 OF 6</a:t>
+              <a:t>Review · 4 of 6</a:t>
             </a:r>
             <a:endParaRPr lang="en-US" sz="1200" dirty="0"/>
           </a:p>
@@ -5105,7 +5105,7 @@
               <a:buNone/>
             </a:pPr>
             <a:r>
-              <a:rPr lang="en-US" sz="1200" b="1" spc="200" kern="0" dirty="0">
+              <a:rPr lang="en-US" sz="1200" b="1" dirty="0">
                 <a:solidFill>
                   <a:srgbClr val="02BDC7"/>
                 </a:solidFill>
@@ -5113,7 +5113,7 @@
                 <a:ea typeface="Consolas" pitchFamily="34" charset="-122"/>
                 <a:cs typeface="Consolas" pitchFamily="34" charset="-120"/>
               </a:rPr>
-              <a:t>REVIEW · 5 OF 6</a:t>
+              <a:t>Review · 5 of 6</a:t>
             </a:r>
             <a:endParaRPr lang="en-US" sz="1200" dirty="0"/>
           </a:p>
@@ -5826,7 +5826,7 @@
               <a:buNone/>
             </a:pPr>
             <a:r>
-              <a:rPr lang="en-US" sz="1200" b="1" spc="200" kern="0" dirty="0">
+              <a:rPr lang="en-US" sz="1200" b="1" dirty="0">
                 <a:solidFill>
                   <a:srgbClr val="FFB600"/>
                 </a:solidFill>
@@ -5834,7 +5834,7 @@
                 <a:ea typeface="Consolas" pitchFamily="34" charset="-122"/>
                 <a:cs typeface="Consolas" pitchFamily="34" charset="-120"/>
               </a:rPr>
-              <a:t>REVIEW · 5 OF 6</a:t>
+              <a:t>Review · 5 of 6</a:t>
             </a:r>
             <a:endParaRPr lang="en-US" sz="1200" dirty="0"/>
           </a:p>
@@ -6550,7 +6550,7 @@
               <a:buNone/>
             </a:pPr>
             <a:r>
-              <a:rPr lang="en-US" sz="1200" b="1" spc="200" kern="0" dirty="0">
+              <a:rPr lang="en-US" sz="1200" b="1" dirty="0">
                 <a:solidFill>
                   <a:srgbClr val="FC4540"/>
                 </a:solidFill>
@@ -6558,7 +6558,7 @@
                 <a:ea typeface="Consolas" pitchFamily="34" charset="-122"/>
                 <a:cs typeface="Consolas" pitchFamily="34" charset="-120"/>
               </a:rPr>
-              <a:t>REVIEW · 6 OF 6</a:t>
+              <a:t>Review · 6 of 6</a:t>
             </a:r>
             <a:endParaRPr lang="en-US" sz="1200" dirty="0"/>
           </a:p>
@@ -7065,7 +7065,7 @@
               <a:buNone/>
             </a:pPr>
             <a:r>
-              <a:rPr lang="en-US" sz="1200" b="1" spc="200" kern="0" dirty="0">
+              <a:rPr lang="en-US" sz="1200" b="1" dirty="0">
                 <a:solidFill>
                   <a:srgbClr val="FF9755"/>
                 </a:solidFill>
@@ -7073,7 +7073,7 @@
                 <a:ea typeface="Consolas" pitchFamily="34" charset="-122"/>
                 <a:cs typeface="Consolas" pitchFamily="34" charset="-120"/>
               </a:rPr>
-              <a:t>REVIEW · 6 OF 6</a:t>
+              <a:t>Review · 6 of 6</a:t>
             </a:r>
             <a:endParaRPr lang="en-US" sz="1200" dirty="0"/>
           </a:p>
@@ -8137,7 +8137,7 @@
               <a:buNone/>
             </a:pPr>
             <a:r>
-              <a:rPr lang="en-US" sz="1200" b="1" spc="200" kern="0" dirty="0">
+              <a:rPr lang="en-US" sz="1200" b="1" dirty="0">
                 <a:solidFill>
                   <a:srgbClr val="FC4540"/>
                 </a:solidFill>
@@ -8145,7 +8145,7 @@
                 <a:ea typeface="Consolas" pitchFamily="34" charset="-122"/>
                 <a:cs typeface="Consolas" pitchFamily="34" charset="-120"/>
               </a:rPr>
-              <a:t>MYTH</a:t>
+              <a:t>Myth</a:t>
             </a:r>
             <a:endParaRPr lang="en-US" sz="1200" dirty="0"/>
           </a:p>
@@ -8454,7 +8454,7 @@
               <a:buNone/>
             </a:pPr>
             <a:r>
-              <a:rPr lang="en-US" sz="1200" b="1" spc="200" kern="0" dirty="0">
+              <a:rPr lang="en-US" sz="1200" b="1" dirty="0">
                 <a:solidFill>
                   <a:srgbClr val="02BDC7"/>
                 </a:solidFill>
@@ -8462,7 +8462,7 @@
                 <a:ea typeface="Consolas" pitchFamily="34" charset="-122"/>
                 <a:cs typeface="Consolas" pitchFamily="34" charset="-120"/>
               </a:rPr>
-              <a:t>FACT</a:t>
+              <a:t>Fact</a:t>
             </a:r>
             <a:endParaRPr lang="en-US" sz="1200" dirty="0"/>
           </a:p>
@@ -8760,7 +8760,7 @@
               <a:buNone/>
             </a:pPr>
             <a:r>
-              <a:rPr lang="en-US" sz="1200" b="1" spc="200" kern="0" dirty="0">
+              <a:rPr lang="en-US" sz="1200" b="1" dirty="0">
                 <a:solidFill>
                   <a:srgbClr val="FC4540"/>
                 </a:solidFill>
@@ -8768,7 +8768,7 @@
                 <a:ea typeface="Consolas" pitchFamily="34" charset="-122"/>
                 <a:cs typeface="Consolas" pitchFamily="34" charset="-120"/>
               </a:rPr>
-              <a:t>LET’S REASSESS THE WORD</a:t>
+              <a:t>Let’s reassess the word</a:t>
             </a:r>
             <a:endParaRPr lang="en-US" sz="1200" dirty="0"/>
           </a:p>
@@ -9276,7 +9276,7 @@
               <a:buNone/>
             </a:pPr>
             <a:r>
-              <a:rPr lang="en-US" sz="1200" b="1" spc="200" kern="0" dirty="0">
+              <a:rPr lang="en-US" sz="1200" b="1" dirty="0">
                 <a:solidFill>
                   <a:srgbClr val="FFB600"/>
                 </a:solidFill>
@@ -9284,7 +9284,7 @@
                 <a:ea typeface="Consolas" pitchFamily="34" charset="-122"/>
                 <a:cs typeface="Consolas" pitchFamily="34" charset="-120"/>
               </a:rPr>
-              <a:t>CONCLUSION PARAGRAPH</a:t>
+              <a:t>Conclusion paragraph</a:t>
             </a:r>
             <a:endParaRPr lang="en-US" sz="1200" dirty="0"/>
           </a:p>
@@ -10136,7 +10136,7 @@
               <a:buNone/>
             </a:pPr>
             <a:r>
-              <a:rPr lang="en-US" sz="1200" b="1" spc="200" kern="0" dirty="0">
+              <a:rPr lang="en-US" sz="1200" b="1" dirty="0">
                 <a:solidFill>
                   <a:srgbClr val="FF9755"/>
                 </a:solidFill>
@@ -10144,7 +10144,7 @@
                 <a:ea typeface="Consolas" pitchFamily="34" charset="-122"/>
                 <a:cs typeface="Consolas" pitchFamily="34" charset="-120"/>
               </a:rPr>
-              <a:t>CONCLUSION PARAGRAPH</a:t>
+              <a:t>Conclusion paragraph</a:t>
             </a:r>
             <a:endParaRPr lang="en-US" sz="1200" dirty="0"/>
           </a:p>
@@ -10453,7 +10453,7 @@
               <a:buNone/>
             </a:pPr>
             <a:r>
-              <a:rPr lang="en-US" sz="1200" b="1" spc="200" kern="0" dirty="0">
+              <a:rPr lang="en-US" sz="1200" b="1" dirty="0">
                 <a:solidFill>
                   <a:srgbClr val="02BDC7"/>
                 </a:solidFill>
@@ -10461,7 +10461,7 @@
                 <a:ea typeface="Consolas" pitchFamily="34" charset="-122"/>
                 <a:cs typeface="Consolas" pitchFamily="34" charset="-120"/>
               </a:rPr>
-              <a:t>PRO-TIP</a:t>
+              <a:t>Pro-tip</a:t>
             </a:r>
             <a:endParaRPr lang="en-US" sz="1200" dirty="0"/>
           </a:p>
@@ -10770,7 +10770,7 @@
               <a:buNone/>
             </a:pPr>
             <a:r>
-              <a:rPr lang="en-US" sz="1200" b="1" spc="200" kern="0" dirty="0">
+              <a:rPr lang="en-US" sz="1200" b="1" dirty="0">
                 <a:solidFill>
                   <a:srgbClr val="02BDC7"/>
                 </a:solidFill>
@@ -10778,7 +10778,7 @@
                 <a:ea typeface="Consolas" pitchFamily="34" charset="-122"/>
                 <a:cs typeface="Consolas" pitchFamily="34" charset="-120"/>
               </a:rPr>
-              <a:t>HALEY’S QUESTION</a:t>
+              <a:t>Haley’s question</a:t>
             </a:r>
             <a:endParaRPr lang="en-US" sz="1200" dirty="0"/>
           </a:p>
@@ -11100,7 +11100,7 @@
               <a:buNone/>
             </a:pPr>
             <a:r>
-              <a:rPr lang="en-US" sz="1200" b="1" spc="200" kern="0" dirty="0">
+              <a:rPr lang="en-US" sz="1200" b="1" dirty="0">
                 <a:solidFill>
                   <a:srgbClr val="FFB600"/>
                 </a:solidFill>
@@ -11108,7 +11108,7 @@
                 <a:ea typeface="Consolas" pitchFamily="34" charset="-122"/>
                 <a:cs typeface="Consolas" pitchFamily="34" charset="-120"/>
               </a:rPr>
-              <a:t>PRO-TIP</a:t>
+              <a:t>Pro-tip</a:t>
             </a:r>
             <a:endParaRPr lang="en-US" sz="1200" dirty="0"/>
           </a:p>
@@ -11417,7 +11417,7 @@
               <a:buNone/>
             </a:pPr>
             <a:r>
-              <a:rPr lang="en-US" sz="1200" b="1" spc="200" kern="0" dirty="0">
+              <a:rPr lang="en-US" sz="1200" b="1" dirty="0">
                 <a:solidFill>
                   <a:srgbClr val="FFB600"/>
                 </a:solidFill>
@@ -11425,7 +11425,7 @@
                 <a:ea typeface="Consolas" pitchFamily="34" charset="-122"/>
                 <a:cs typeface="Consolas" pitchFamily="34" charset="-120"/>
               </a:rPr>
-              <a:t>STATEMENT OF “PERHAPS”: EXAMPLE</a:t>
+              <a:t>Statement of “perhaps”: example</a:t>
             </a:r>
             <a:endParaRPr lang="en-US" sz="1200" dirty="0"/>
           </a:p>
@@ -11751,7 +11751,7 @@
               <a:buNone/>
             </a:pPr>
             <a:r>
-              <a:rPr lang="en-US" sz="1200" b="1" spc="200" kern="0" dirty="0">
+              <a:rPr lang="en-US" sz="1200" b="1" dirty="0">
                 <a:solidFill>
                   <a:srgbClr val="02BDC7"/>
                 </a:solidFill>
@@ -11759,7 +11759,7 @@
                 <a:ea typeface="Consolas" pitchFamily="34" charset="-122"/>
                 <a:cs typeface="Consolas" pitchFamily="34" charset="-120"/>
               </a:rPr>
-              <a:t>SUGGESTED CONCLUSION STRUCTURE</a:t>
+              <a:t>Suggested conclusion structure</a:t>
             </a:r>
             <a:endParaRPr lang="en-US" sz="1200" dirty="0"/>
           </a:p>
@@ -12711,7 +12711,7 @@
               <a:buNone/>
             </a:pPr>
             <a:r>
-              <a:rPr lang="en-US" sz="1200" b="1" spc="200" kern="0" dirty="0">
+              <a:rPr lang="en-US" sz="1200" b="1" dirty="0">
                 <a:solidFill>
                   <a:srgbClr val="02BDC7"/>
                 </a:solidFill>
@@ -12719,7 +12719,7 @@
                 <a:ea typeface="Consolas" pitchFamily="34" charset="-122"/>
                 <a:cs typeface="Consolas" pitchFamily="34" charset="-120"/>
               </a:rPr>
-              <a:t>PUTTING IT TOGETHER</a:t>
+              <a:t>Putting it together</a:t>
             </a:r>
             <a:endParaRPr lang="en-US" sz="1200" dirty="0"/>
           </a:p>
@@ -13049,7 +13049,7 @@
               <a:buNone/>
             </a:pPr>
             <a:r>
-              <a:rPr lang="en-US" sz="1200" b="1" spc="200" kern="0" dirty="0">
+              <a:rPr lang="en-US" sz="1200" b="1" dirty="0">
                 <a:solidFill>
                   <a:srgbClr val="FFB600"/>
                 </a:solidFill>
@@ -13057,7 +13057,7 @@
                 <a:ea typeface="Consolas" pitchFamily="34" charset="-122"/>
                 <a:cs typeface="Consolas" pitchFamily="34" charset="-120"/>
               </a:rPr>
-              <a:t>THE HOUSE ANALOGY</a:t>
+              <a:t>The house analogy</a:t>
             </a:r>
             <a:endParaRPr lang="en-US" sz="1200" dirty="0"/>
           </a:p>
@@ -13657,7 +13657,7 @@
               <a:buNone/>
             </a:pPr>
             <a:r>
-              <a:rPr lang="en-US" sz="1200" b="1" spc="200" kern="0" dirty="0">
+              <a:rPr lang="en-US" sz="1200" b="1" dirty="0">
                 <a:solidFill>
                   <a:srgbClr val="FFB600"/>
                 </a:solidFill>
@@ -13665,7 +13665,7 @@
                 <a:ea typeface="Consolas" pitchFamily="34" charset="-122"/>
                 <a:cs typeface="Consolas" pitchFamily="34" charset="-120"/>
               </a:rPr>
-              <a:t>YOUR TURN</a:t>
+              <a:t>Your turn</a:t>
             </a:r>
             <a:endParaRPr lang="en-US" sz="1200" dirty="0"/>
           </a:p>
@@ -15105,7 +15105,7 @@
               <a:buNone/>
             </a:pPr>
             <a:r>
-              <a:rPr lang="en-US" sz="1200" b="1" spc="200" kern="0" dirty="0">
+              <a:rPr lang="en-US" sz="1200" b="1" dirty="0">
                 <a:solidFill>
                   <a:srgbClr val="FC4540"/>
                 </a:solidFill>
@@ -15113,7 +15113,7 @@
                 <a:ea typeface="Consolas" pitchFamily="34" charset="-122"/>
                 <a:cs typeface="Consolas" pitchFamily="34" charset="-120"/>
               </a:rPr>
-              <a:t>REVIEW · 1 OF 6</a:t>
+              <a:t>Review · 1 of 6</a:t>
             </a:r>
             <a:endParaRPr lang="en-US" sz="1200" dirty="0"/>
           </a:p>
@@ -15929,7 +15929,7 @@
               <a:buNone/>
             </a:pPr>
             <a:r>
-              <a:rPr lang="en-US" sz="1200" b="1" spc="200" kern="0" dirty="0">
+              <a:rPr lang="en-US" sz="1200" b="1" dirty="0">
                 <a:solidFill>
                   <a:srgbClr val="FF9755"/>
                 </a:solidFill>
@@ -15937,7 +15937,7 @@
                 <a:ea typeface="Consolas" pitchFamily="34" charset="-122"/>
                 <a:cs typeface="Consolas" pitchFamily="34" charset="-120"/>
               </a:rPr>
-              <a:t>REVIEW · 1 OF 6</a:t>
+              <a:t>Review · 1 of 6</a:t>
             </a:r>
             <a:endParaRPr lang="en-US" sz="1200" dirty="0"/>
           </a:p>
@@ -16756,7 +16756,7 @@
               <a:buNone/>
             </a:pPr>
             <a:r>
-              <a:rPr lang="en-US" sz="1200" b="1" spc="200" kern="0" dirty="0">
+              <a:rPr lang="en-US" sz="1200" b="1" dirty="0">
                 <a:solidFill>
                   <a:srgbClr val="FC4067"/>
                 </a:solidFill>
@@ -16764,7 +16764,7 @@
                 <a:ea typeface="Consolas" pitchFamily="34" charset="-122"/>
                 <a:cs typeface="Consolas" pitchFamily="34" charset="-120"/>
               </a:rPr>
-              <a:t>REVIEW · 2 OF 6</a:t>
+              <a:t>Review · 2 of 6</a:t>
             </a:r>
             <a:endParaRPr lang="en-US" sz="1200" dirty="0"/>
           </a:p>
@@ -17580,7 +17580,7 @@
               <a:buNone/>
             </a:pPr>
             <a:r>
-              <a:rPr lang="en-US" sz="1200" b="1" spc="200" kern="0" dirty="0">
+              <a:rPr lang="en-US" sz="1200" b="1" dirty="0">
                 <a:solidFill>
                   <a:srgbClr val="02BDC7"/>
                 </a:solidFill>
@@ -17588,7 +17588,7 @@
                 <a:ea typeface="Consolas" pitchFamily="34" charset="-122"/>
                 <a:cs typeface="Consolas" pitchFamily="34" charset="-120"/>
               </a:rPr>
-              <a:t>REVIEW · 2 OF 6</a:t>
+              <a:t>Review · 2 of 6</a:t>
             </a:r>
             <a:endParaRPr lang="en-US" sz="1200" dirty="0"/>
           </a:p>
@@ -18407,7 +18407,7 @@
               <a:buNone/>
             </a:pPr>
             <a:r>
-              <a:rPr lang="en-US" sz="1200" b="1" spc="200" kern="0" dirty="0">
+              <a:rPr lang="en-US" sz="1200" b="1" dirty="0">
                 <a:solidFill>
                   <a:srgbClr val="FFB600"/>
                 </a:solidFill>
@@ -18415,7 +18415,7 @@
                 <a:ea typeface="Consolas" pitchFamily="34" charset="-122"/>
                 <a:cs typeface="Consolas" pitchFamily="34" charset="-120"/>
               </a:rPr>
-              <a:t>REVIEW · 3 OF 6</a:t>
+              <a:t>Review · 3 of 6</a:t>
             </a:r>
             <a:endParaRPr lang="en-US" sz="1200" dirty="0"/>
           </a:p>
@@ -19231,7 +19231,7 @@
               <a:buNone/>
             </a:pPr>
             <a:r>
-              <a:rPr lang="en-US" sz="1200" b="1" spc="200" kern="0" dirty="0">
+              <a:rPr lang="en-US" sz="1200" b="1" dirty="0">
                 <a:solidFill>
                   <a:srgbClr val="FC4540"/>
                 </a:solidFill>
@@ -19239,7 +19239,7 @@
                 <a:ea typeface="Consolas" pitchFamily="34" charset="-122"/>
                 <a:cs typeface="Consolas" pitchFamily="34" charset="-120"/>
               </a:rPr>
-              <a:t>REVIEW · 3 OF 6</a:t>
+              <a:t>Review · 3 of 6</a:t>
             </a:r>
             <a:endParaRPr lang="en-US" sz="1200" dirty="0"/>
           </a:p>
@@ -20058,7 +20058,7 @@
               <a:buNone/>
             </a:pPr>
             <a:r>
-              <a:rPr lang="en-US" sz="1200" b="1" spc="200" kern="0" dirty="0">
+              <a:rPr lang="en-US" sz="1200" b="1" dirty="0">
                 <a:solidFill>
                   <a:srgbClr val="FF9755"/>
                 </a:solidFill>
@@ -20066,7 +20066,7 @@
                 <a:ea typeface="Consolas" pitchFamily="34" charset="-122"/>
                 <a:cs typeface="Consolas" pitchFamily="34" charset="-120"/>
               </a:rPr>
-              <a:t>REVIEW · 4 OF 6</a:t>
+              <a:t>Review · 4 of 6</a:t>
             </a:r>
             <a:endParaRPr lang="en-US" sz="1200" dirty="0"/>
           </a:p>
